--- a/inyeccion_owasp.pptx
+++ b/inyeccion_owasp.pptx
@@ -7498,7 +7498,7 @@
         </p:nvSpPr>
         <p:spPr>
           <a:xfrm>
-            <a:off x="14390191" y="2169914"/>
+            <a:off x="15026677" y="2146102"/>
             <a:ext cx="971550" cy="361950"/>
           </a:xfrm>
           <a:prstGeom prst="roundRect">
@@ -7529,7 +7529,7 @@
         </p:nvSpPr>
         <p:spPr>
           <a:xfrm>
-            <a:off x="14542591" y="2227064"/>
+            <a:off x="15255277" y="2200871"/>
             <a:ext cx="742950" cy="285750"/>
           </a:xfrm>
           <a:prstGeom prst="rect">
